--- a/test-corpus/word-verification/treemap.pptx
+++ b/test-corpus/word-verification/treemap.pptx
@@ -144,8 +144,8 @@
         </p:nvSpPr>
         <p:spPr>
           <a:xfrm>
-            <a:off x="2207623" y="1233351"/>
-            <a:ext cx="5956663" cy="4962797"/>
+            <a:off x="633070" y="1582331"/>
+            <a:ext cx="5118928" cy="4264838"/>
           </a:xfrm>
           <a:prstGeom prst="rect">
             <a:avLst/>
@@ -153,7 +153,7 @@
           <a:solidFill>
             <a:srgbClr val="ABC0E4"/>
           </a:solidFill>
-          <a:ln w="12791">
+          <a:ln w="10992">
             <a:solidFill>
               <a:srgbClr val="FFFFFF"/>
             </a:solidFill>
@@ -168,8 +168,8 @@
         </p:nvSpPr>
         <p:spPr>
           <a:xfrm>
-            <a:off x="2207623" y="1233351"/>
-            <a:ext cx="5956663" cy="281396"/>
+            <a:off x="633070" y="1582331"/>
+            <a:ext cx="5118928" cy="241821"/>
           </a:xfrm>
           <a:prstGeom prst="rect">
             <a:avLst/>
@@ -177,7 +177,7 @@
           <a:solidFill>
             <a:srgbClr val="698ED0"/>
           </a:solidFill>
-          <a:ln w="12791">
+          <a:ln w="10992">
             <a:solidFill>
               <a:srgbClr val="FFFFFF"/>
             </a:solidFill>
@@ -196,7 +196,7 @@
               </a:spcAft>
             </a:pPr>
             <a:r>
-              <a:rPr lang="en-US" b="1" sz="1343" dirty="0">
+              <a:rPr lang="en-US" b="1" sz="1154" dirty="0">
                 <a:solidFill>
                   <a:srgbClr val="FFFFFF"/>
                 </a:solidFill>
@@ -214,8 +214,8 @@
         </p:nvSpPr>
         <p:spPr>
           <a:xfrm>
-            <a:off x="2258786" y="1565910"/>
-            <a:ext cx="3252409" cy="4579076"/>
+            <a:off x="677037" y="1868119"/>
+            <a:ext cx="2794996" cy="3935082"/>
           </a:xfrm>
           <a:prstGeom prst="rect">
             <a:avLst/>
@@ -223,7 +223,7 @@
           <a:solidFill>
             <a:srgbClr val="C1D0EC"/>
           </a:solidFill>
-          <a:ln w="12791">
+          <a:ln w="10992">
             <a:solidFill>
               <a:srgbClr val="FFFFFF"/>
             </a:solidFill>
@@ -238,8 +238,8 @@
         </p:nvSpPr>
         <p:spPr>
           <a:xfrm>
-            <a:off x="2258786" y="1565910"/>
-            <a:ext cx="3252409" cy="281396"/>
+            <a:off x="677037" y="1868119"/>
+            <a:ext cx="2794996" cy="241821"/>
           </a:xfrm>
           <a:prstGeom prst="rect">
             <a:avLst/>
@@ -247,7 +247,7 @@
           <a:solidFill>
             <a:srgbClr val="85A3D9"/>
           </a:solidFill>
-          <a:ln w="12791">
+          <a:ln w="10992">
             <a:solidFill>
               <a:srgbClr val="FFFFFF"/>
             </a:solidFill>
@@ -266,7 +266,7 @@
               </a:spcAft>
             </a:pPr>
             <a:r>
-              <a:rPr lang="en-US" b="1" sz="1343" dirty="0">
+              <a:rPr lang="en-US" b="1" sz="1154" dirty="0">
                 <a:solidFill>
                   <a:srgbClr val="000000"/>
                 </a:solidFill>
@@ -284,8 +284,8 @@
         </p:nvSpPr>
         <p:spPr>
           <a:xfrm>
-            <a:off x="2309949" y="1898469"/>
-            <a:ext cx="3150084" cy="2097677"/>
+            <a:off x="721004" y="2153907"/>
+            <a:ext cx="2707061" cy="1802663"/>
           </a:xfrm>
           <a:prstGeom prst="rect">
             <a:avLst/>
@@ -293,7 +293,7 @@
           <a:solidFill>
             <a:srgbClr val="BECEEA"/>
           </a:solidFill>
-          <a:ln w="12791">
+          <a:ln w="10992">
             <a:solidFill>
               <a:srgbClr val="FFFFFF"/>
             </a:solidFill>
@@ -312,7 +312,7 @@
               </a:spcAft>
             </a:pPr>
             <a:r>
-              <a:rPr lang="en-US" sz="1343" dirty="0">
+              <a:rPr lang="en-US" sz="1154" dirty="0">
                 <a:solidFill>
                   <a:srgbClr val="000000"/>
                 </a:solidFill>
@@ -330,7 +330,7 @@
               </a:spcAft>
             </a:pPr>
             <a:r>
-              <a:rPr lang="en-US" sz="1343" dirty="0">
+              <a:rPr lang="en-US" sz="1154" dirty="0">
                 <a:solidFill>
                   <a:srgbClr val="000000"/>
                 </a:solidFill>
@@ -348,8 +348,8 @@
         </p:nvSpPr>
         <p:spPr>
           <a:xfrm>
-            <a:off x="2309949" y="3996146"/>
-            <a:ext cx="1890050" cy="2097677"/>
+            <a:off x="721004" y="3956571"/>
+            <a:ext cx="1624237" cy="1802663"/>
           </a:xfrm>
           <a:prstGeom prst="rect">
             <a:avLst/>
@@ -357,7 +357,7 @@
           <a:solidFill>
             <a:srgbClr val="BECEEA"/>
           </a:solidFill>
-          <a:ln w="12791">
+          <a:ln w="10992">
             <a:solidFill>
               <a:srgbClr val="FFFFFF"/>
             </a:solidFill>
@@ -376,7 +376,7 @@
               </a:spcAft>
             </a:pPr>
             <a:r>
-              <a:rPr lang="en-US" sz="1343" dirty="0">
+              <a:rPr lang="en-US" sz="1154" dirty="0">
                 <a:solidFill>
                   <a:srgbClr val="000000"/>
                 </a:solidFill>
@@ -394,7 +394,7 @@
               </a:spcAft>
             </a:pPr>
             <a:r>
-              <a:rPr lang="en-US" sz="1343" dirty="0">
+              <a:rPr lang="en-US" sz="1154" dirty="0">
                 <a:solidFill>
                   <a:srgbClr val="000000"/>
                 </a:solidFill>
@@ -412,8 +412,8 @@
         </p:nvSpPr>
         <p:spPr>
           <a:xfrm>
-            <a:off x="4199999" y="3996146"/>
-            <a:ext cx="1260034" cy="2097677"/>
+            <a:off x="2345241" y="3956571"/>
+            <a:ext cx="1082825" cy="1802663"/>
           </a:xfrm>
           <a:prstGeom prst="rect">
             <a:avLst/>
@@ -421,7 +421,7 @@
           <a:solidFill>
             <a:srgbClr val="BECEEA"/>
           </a:solidFill>
-          <a:ln w="12791">
+          <a:ln w="10992">
             <a:solidFill>
               <a:srgbClr val="FFFFFF"/>
             </a:solidFill>
@@ -440,7 +440,7 @@
               </a:spcAft>
             </a:pPr>
             <a:r>
-              <a:rPr lang="en-US" sz="1343" dirty="0">
+              <a:rPr lang="en-US" sz="1154" dirty="0">
                 <a:solidFill>
                   <a:srgbClr val="000000"/>
                 </a:solidFill>
@@ -458,7 +458,7 @@
               </a:spcAft>
             </a:pPr>
             <a:r>
-              <a:rPr lang="en-US" sz="1343" dirty="0">
+              <a:rPr lang="en-US" sz="1154" dirty="0">
                 <a:solidFill>
                   <a:srgbClr val="000000"/>
                 </a:solidFill>
@@ -476,8 +476,8 @@
         </p:nvSpPr>
         <p:spPr>
           <a:xfrm>
-            <a:off x="5511195" y="1565910"/>
-            <a:ext cx="2601928" cy="4579076"/>
+            <a:off x="3472033" y="1868119"/>
+            <a:ext cx="2235997" cy="3935082"/>
           </a:xfrm>
           <a:prstGeom prst="rect">
             <a:avLst/>
@@ -485,7 +485,7 @@
           <a:solidFill>
             <a:srgbClr val="C1D0EC"/>
           </a:solidFill>
-          <a:ln w="12791">
+          <a:ln w="10992">
             <a:solidFill>
               <a:srgbClr val="FFFFFF"/>
             </a:solidFill>
@@ -500,8 +500,8 @@
         </p:nvSpPr>
         <p:spPr>
           <a:xfrm>
-            <a:off x="5511195" y="1565910"/>
-            <a:ext cx="2601928" cy="281396"/>
+            <a:off x="3472033" y="1868119"/>
+            <a:ext cx="2235997" cy="241821"/>
           </a:xfrm>
           <a:prstGeom prst="rect">
             <a:avLst/>
@@ -509,7 +509,7 @@
           <a:solidFill>
             <a:srgbClr val="85A3D9"/>
           </a:solidFill>
-          <a:ln w="12791">
+          <a:ln w="10992">
             <a:solidFill>
               <a:srgbClr val="FFFFFF"/>
             </a:solidFill>
@@ -528,7 +528,7 @@
               </a:spcAft>
             </a:pPr>
             <a:r>
-              <a:rPr lang="en-US" b="1" sz="1343" dirty="0">
+              <a:rPr lang="en-US" b="1" sz="1154" dirty="0">
                 <a:solidFill>
                   <a:srgbClr val="000000"/>
                 </a:solidFill>
@@ -546,8 +546,8 @@
         </p:nvSpPr>
         <p:spPr>
           <a:xfrm>
-            <a:off x="5562358" y="1898469"/>
-            <a:ext cx="2499602" cy="2097677"/>
+            <a:off x="3516000" y="2153907"/>
+            <a:ext cx="2148063" cy="1802663"/>
           </a:xfrm>
           <a:prstGeom prst="rect">
             <a:avLst/>
@@ -555,7 +555,7 @@
           <a:solidFill>
             <a:srgbClr val="BECEEA"/>
           </a:solidFill>
-          <a:ln w="12791">
+          <a:ln w="10992">
             <a:solidFill>
               <a:srgbClr val="FFFFFF"/>
             </a:solidFill>
@@ -574,7 +574,7 @@
               </a:spcAft>
             </a:pPr>
             <a:r>
-              <a:rPr lang="en-US" sz="1343" dirty="0">
+              <a:rPr lang="en-US" sz="1154" dirty="0">
                 <a:solidFill>
                   <a:srgbClr val="000000"/>
                 </a:solidFill>
@@ -592,7 +592,7 @@
               </a:spcAft>
             </a:pPr>
             <a:r>
-              <a:rPr lang="en-US" sz="1343" dirty="0">
+              <a:rPr lang="en-US" sz="1154" dirty="0">
                 <a:solidFill>
                   <a:srgbClr val="000000"/>
                 </a:solidFill>
@@ -610,8 +610,8 @@
         </p:nvSpPr>
         <p:spPr>
           <a:xfrm>
-            <a:off x="5562358" y="3996146"/>
-            <a:ext cx="2499602" cy="2097677"/>
+            <a:off x="3516000" y="3956571"/>
+            <a:ext cx="2148063" cy="1802663"/>
           </a:xfrm>
           <a:prstGeom prst="rect">
             <a:avLst/>
@@ -619,7 +619,7 @@
           <a:solidFill>
             <a:srgbClr val="FF9966"/>
           </a:solidFill>
-          <a:ln w="12791">
+          <a:ln w="10992">
             <a:solidFill>
               <a:srgbClr val="333333"/>
             </a:solidFill>
@@ -634,8 +634,8 @@
         </p:nvSpPr>
         <p:spPr>
           <a:xfrm>
-            <a:off x="5562358" y="3996146"/>
-            <a:ext cx="2499602" cy="281396"/>
+            <a:off x="3516000" y="3956571"/>
+            <a:ext cx="2148063" cy="241821"/>
           </a:xfrm>
           <a:prstGeom prst="rect">
             <a:avLst/>
@@ -643,7 +643,7 @@
           <a:solidFill>
             <a:srgbClr val="FF9966"/>
           </a:solidFill>
-          <a:ln w="12791">
+          <a:ln w="10992">
             <a:solidFill>
               <a:srgbClr val="333333"/>
             </a:solidFill>
@@ -662,7 +662,7 @@
               </a:spcAft>
             </a:pPr>
             <a:r>
-              <a:rPr lang="en-US" b="1" sz="1343" dirty="0">
+              <a:rPr lang="en-US" b="1" sz="1154" dirty="0">
                 <a:solidFill>
                   <a:srgbClr val="000000"/>
                 </a:solidFill>
@@ -680,8 +680,8 @@
         </p:nvSpPr>
         <p:spPr>
           <a:xfrm>
-            <a:off x="5613521" y="4328704"/>
-            <a:ext cx="1498298" cy="1713956"/>
+            <a:off x="3559968" y="4242359"/>
+            <a:ext cx="1287580" cy="1472908"/>
           </a:xfrm>
           <a:prstGeom prst="rect">
             <a:avLst/>
@@ -689,7 +689,7 @@
           <a:solidFill>
             <a:srgbClr val="DAE3F3"/>
           </a:solidFill>
-          <a:ln w="12791">
+          <a:ln w="10992">
             <a:solidFill>
               <a:srgbClr val="FFFFFF"/>
             </a:solidFill>
@@ -708,7 +708,7 @@
               </a:spcAft>
             </a:pPr>
             <a:r>
-              <a:rPr lang="en-US" sz="1343" dirty="0">
+              <a:rPr lang="en-US" sz="1154" dirty="0">
                 <a:solidFill>
                   <a:srgbClr val="000000"/>
                 </a:solidFill>
@@ -726,7 +726,7 @@
               </a:spcAft>
             </a:pPr>
             <a:r>
-              <a:rPr lang="en-US" sz="1343" dirty="0">
+              <a:rPr lang="en-US" sz="1154" dirty="0">
                 <a:solidFill>
                   <a:srgbClr val="000000"/>
                 </a:solidFill>
@@ -744,8 +744,8 @@
         </p:nvSpPr>
         <p:spPr>
           <a:xfrm>
-            <a:off x="7111819" y="4328704"/>
-            <a:ext cx="898978" cy="1713956"/>
+            <a:off x="4847548" y="4242359"/>
+            <a:ext cx="772548" cy="1472908"/>
           </a:xfrm>
           <a:prstGeom prst="rect">
             <a:avLst/>
@@ -753,7 +753,7 @@
           <a:solidFill>
             <a:srgbClr val="DAE3F3"/>
           </a:solidFill>
-          <a:ln w="12791">
+          <a:ln w="10992">
             <a:solidFill>
               <a:srgbClr val="FFFFFF"/>
             </a:solidFill>
@@ -772,7 +772,7 @@
               </a:spcAft>
             </a:pPr>
             <a:r>
-              <a:rPr lang="en-US" sz="1343" dirty="0">
+              <a:rPr lang="en-US" sz="1154" dirty="0">
                 <a:solidFill>
                   <a:srgbClr val="000000"/>
                 </a:solidFill>
@@ -790,7 +790,7 @@
               </a:spcAft>
             </a:pPr>
             <a:r>
-              <a:rPr lang="en-US" sz="1343" dirty="0">
+              <a:rPr lang="en-US" sz="1154" dirty="0">
                 <a:solidFill>
                   <a:srgbClr val="000000"/>
                 </a:solidFill>
@@ -808,8 +808,8 @@
         </p:nvSpPr>
         <p:spPr>
           <a:xfrm>
-            <a:off x="8164286" y="1233351"/>
-            <a:ext cx="1820091" cy="4962797"/>
+            <a:off x="5751998" y="1582331"/>
+            <a:ext cx="1564117" cy="4264838"/>
           </a:xfrm>
           <a:prstGeom prst="rect">
             <a:avLst/>
@@ -817,7 +817,7 @@
           <a:solidFill>
             <a:srgbClr val="F7C5A2"/>
           </a:solidFill>
-          <a:ln w="12791">
+          <a:ln w="10992">
             <a:solidFill>
               <a:srgbClr val="FFFFFF"/>
             </a:solidFill>
@@ -832,8 +832,8 @@
         </p:nvSpPr>
         <p:spPr>
           <a:xfrm>
-            <a:off x="8164286" y="1233351"/>
-            <a:ext cx="1820091" cy="281396"/>
+            <a:off x="5751998" y="1582331"/>
+            <a:ext cx="1564117" cy="241821"/>
           </a:xfrm>
           <a:prstGeom prst="rect">
             <a:avLst/>
@@ -841,7 +841,7 @@
           <a:solidFill>
             <a:srgbClr val="F1975A"/>
           </a:solidFill>
-          <a:ln w="12791">
+          <a:ln w="10992">
             <a:solidFill>
               <a:srgbClr val="FFFFFF"/>
             </a:solidFill>
@@ -860,7 +860,7 @@
               </a:spcAft>
             </a:pPr>
             <a:r>
-              <a:rPr lang="en-US" b="1" sz="1343" dirty="0">
+              <a:rPr lang="en-US" b="1" sz="1154" dirty="0">
                 <a:solidFill>
                   <a:srgbClr val="FFFFFF"/>
                 </a:solidFill>
@@ -878,8 +878,8 @@
         </p:nvSpPr>
         <p:spPr>
           <a:xfrm>
-            <a:off x="8215449" y="1565910"/>
-            <a:ext cx="1717765" cy="2913957"/>
+            <a:off x="5795965" y="1868119"/>
+            <a:ext cx="1476182" cy="2504143"/>
           </a:xfrm>
           <a:prstGeom prst="rect">
             <a:avLst/>
@@ -887,7 +887,7 @@
           <a:solidFill>
             <a:srgbClr val="F6BE98"/>
           </a:solidFill>
-          <a:ln w="12791">
+          <a:ln w="10992">
             <a:solidFill>
               <a:srgbClr val="FFFFFF"/>
             </a:solidFill>
@@ -906,7 +906,7 @@
               </a:spcAft>
             </a:pPr>
             <a:r>
-              <a:rPr lang="en-US" sz="1343" dirty="0">
+              <a:rPr lang="en-US" sz="1154" dirty="0">
                 <a:solidFill>
                   <a:srgbClr val="000000"/>
                 </a:solidFill>
@@ -924,7 +924,7 @@
               </a:spcAft>
             </a:pPr>
             <a:r>
-              <a:rPr lang="en-US" sz="1343" dirty="0">
+              <a:rPr lang="en-US" sz="1154" dirty="0">
                 <a:solidFill>
                   <a:srgbClr val="000000"/>
                 </a:solidFill>
@@ -942,8 +942,8 @@
         </p:nvSpPr>
         <p:spPr>
           <a:xfrm>
-            <a:off x="8215449" y="4479867"/>
-            <a:ext cx="1030659" cy="1665119"/>
+            <a:off x="5795965" y="4372262"/>
+            <a:ext cx="885709" cy="1430939"/>
           </a:xfrm>
           <a:prstGeom prst="rect">
             <a:avLst/>
@@ -951,7 +951,7 @@
           <a:solidFill>
             <a:srgbClr val="F6BE98"/>
           </a:solidFill>
-          <a:ln w="12791">
+          <a:ln w="10992">
             <a:solidFill>
               <a:srgbClr val="FFFFFF"/>
             </a:solidFill>
@@ -970,7 +970,7 @@
               </a:spcAft>
             </a:pPr>
             <a:r>
-              <a:rPr lang="en-US" sz="1343" dirty="0">
+              <a:rPr lang="en-US" sz="1154" dirty="0">
                 <a:solidFill>
                   <a:srgbClr val="000000"/>
                 </a:solidFill>
@@ -988,7 +988,7 @@
               </a:spcAft>
             </a:pPr>
             <a:r>
-              <a:rPr lang="en-US" sz="1343" dirty="0">
+              <a:rPr lang="en-US" sz="1154" dirty="0">
                 <a:solidFill>
                   <a:srgbClr val="000000"/>
                 </a:solidFill>
@@ -1006,8 +1006,8 @@
         </p:nvSpPr>
         <p:spPr>
           <a:xfrm>
-            <a:off x="9246108" y="4479867"/>
-            <a:ext cx="687106" cy="1665119"/>
+            <a:off x="6681674" y="4372262"/>
+            <a:ext cx="590473" cy="1430939"/>
           </a:xfrm>
           <a:prstGeom prst="rect">
             <a:avLst/>
@@ -1015,7 +1015,7 @@
           <a:solidFill>
             <a:srgbClr val="F6BE98"/>
           </a:solidFill>
-          <a:ln w="12791">
+          <a:ln w="10992">
             <a:solidFill>
               <a:srgbClr val="FFFFFF"/>
             </a:solidFill>
@@ -1034,7 +1034,7 @@
               </a:spcAft>
             </a:pPr>
             <a:r>
-              <a:rPr lang="en-US" sz="1074" dirty="0">
+              <a:rPr lang="en-US" sz="923" dirty="0">
                 <a:solidFill>
                   <a:srgbClr val="000000"/>
                 </a:solidFill>
@@ -1052,12 +1052,253 @@
               </a:spcAft>
             </a:pPr>
             <a:r>
-              <a:rPr lang="en-US" sz="1074" dirty="0">
+              <a:rPr lang="en-US" sz="923" dirty="0">
                 <a:solidFill>
                   <a:srgbClr val="000000"/>
                 </a:solidFill>
               </a:rPr>
               <a:t>8</a:t>
+            </a:r>
+          </a:p>
+        </p:txBody>
+      </p:sp>
+      <p:sp>
+        <p:nvSpPr>
+          <p:cNvPr id="4" name="Mermaid source"/>
+          <p:cNvSpPr/>
+          <p:nvPr/>
+        </p:nvSpPr>
+        <p:spPr>
+          <a:xfrm>
+            <a:off x="7674864" y="1028700"/>
+            <a:ext cx="4059936" cy="5372100"/>
+          </a:xfrm>
+          <a:prstGeom prst="rect">
+            <a:avLst/>
+          </a:prstGeom>
+          <a:solidFill>
+            <a:srgbClr val="F3F4F6"/>
+          </a:solidFill>
+          <a:ln w="9525">
+            <a:solidFill>
+              <a:srgbClr val="D1D5DB"/>
+            </a:solidFill>
+          </a:ln>
+        </p:spPr>
+        <p:txBody>
+          <a:bodyPr wrap="square" lIns="91440" tIns="45720" rIns="91440" bIns="45720" anchor="t">
+            <a:noAutofit/>
+          </a:bodyPr>
+          <a:lstStyle/>
+          <a:p>
+            <a:pPr algn="l"/>
+            <a:r>
+              <a:rPr lang="en-US" sz="1400" dirty="0">
+                <a:solidFill>
+                  <a:srgbClr val="1F2937"/>
+                </a:solidFill>
+                <a:latin typeface="Consolas"/>
+                <a:cs typeface="Consolas"/>
+              </a:rPr>
+              <a:t>treemap-beta</a:t>
+            </a:r>
+          </a:p>
+          <a:p>
+            <a:pPr algn="l"/>
+            <a:r>
+              <a:rPr lang="en-US" sz="1400" dirty="0">
+                <a:solidFill>
+                  <a:srgbClr val="1F2937"/>
+                </a:solidFill>
+                <a:latin typeface="Consolas"/>
+                <a:cs typeface="Consolas"/>
+              </a:rPr>
+              <a:t>"Products"</a:t>
+            </a:r>
+          </a:p>
+          <a:p>
+            <a:pPr algn="l"/>
+            <a:r>
+              <a:rPr lang="en-US" sz="1400" dirty="0">
+                <a:solidFill>
+                  <a:srgbClr val="1F2937"/>
+                </a:solidFill>
+                <a:latin typeface="Consolas"/>
+                <a:cs typeface="Consolas"/>
+              </a:rPr>
+              <a:t>    "Electronics"</a:t>
+            </a:r>
+          </a:p>
+          <a:p>
+            <a:pPr algn="l"/>
+            <a:r>
+              <a:rPr lang="en-US" sz="1400" dirty="0">
+                <a:solidFill>
+                  <a:srgbClr val="1F2937"/>
+                </a:solidFill>
+                <a:latin typeface="Consolas"/>
+                <a:cs typeface="Consolas"/>
+              </a:rPr>
+              <a:t>        "Phones": 50</a:t>
+            </a:r>
+          </a:p>
+          <a:p>
+            <a:pPr algn="l"/>
+            <a:r>
+              <a:rPr lang="en-US" sz="1400" dirty="0">
+                <a:solidFill>
+                  <a:srgbClr val="1F2937"/>
+                </a:solidFill>
+                <a:latin typeface="Consolas"/>
+                <a:cs typeface="Consolas"/>
+              </a:rPr>
+              <a:t>        "Computers": 30</a:t>
+            </a:r>
+          </a:p>
+          <a:p>
+            <a:pPr algn="l"/>
+            <a:r>
+              <a:rPr lang="en-US" sz="1400" dirty="0">
+                <a:solidFill>
+                  <a:srgbClr val="1F2937"/>
+                </a:solidFill>
+                <a:latin typeface="Consolas"/>
+                <a:cs typeface="Consolas"/>
+              </a:rPr>
+              <a:t>        "Accessories": 20</a:t>
+            </a:r>
+          </a:p>
+          <a:p>
+            <a:pPr algn="l"/>
+            <a:r>
+              <a:rPr lang="en-US" sz="1400" dirty="0">
+                <a:solidFill>
+                  <a:srgbClr val="1F2937"/>
+                </a:solidFill>
+                <a:latin typeface="Consolas"/>
+                <a:cs typeface="Consolas"/>
+              </a:rPr>
+              <a:t>    "Clothing"</a:t>
+            </a:r>
+          </a:p>
+          <a:p>
+            <a:pPr algn="l"/>
+            <a:r>
+              <a:rPr lang="en-US" sz="1400" dirty="0">
+                <a:solidFill>
+                  <a:srgbClr val="1F2937"/>
+                </a:solidFill>
+                <a:latin typeface="Consolas"/>
+                <a:cs typeface="Consolas"/>
+              </a:rPr>
+              <a:t>        "Men's": 40</a:t>
+            </a:r>
+          </a:p>
+          <a:p>
+            <a:pPr algn="l"/>
+            <a:r>
+              <a:rPr lang="en-US" sz="1400" dirty="0">
+                <a:solidFill>
+                  <a:srgbClr val="1F2937"/>
+                </a:solidFill>
+                <a:latin typeface="Consolas"/>
+                <a:cs typeface="Consolas"/>
+              </a:rPr>
+              <a:t>        "Women's":::important</a:t>
+            </a:r>
+          </a:p>
+          <a:p>
+            <a:pPr algn="l"/>
+            <a:r>
+              <a:rPr lang="en-US" sz="1400" dirty="0">
+                <a:solidFill>
+                  <a:srgbClr val="1F2937"/>
+                </a:solidFill>
+                <a:latin typeface="Consolas"/>
+                <a:cs typeface="Consolas"/>
+              </a:rPr>
+              <a:t>            "Dresses": 25</a:t>
+            </a:r>
+          </a:p>
+          <a:p>
+            <a:pPr algn="l"/>
+            <a:r>
+              <a:rPr lang="en-US" sz="1400" dirty="0">
+                <a:solidFill>
+                  <a:srgbClr val="1F2937"/>
+                </a:solidFill>
+                <a:latin typeface="Consolas"/>
+                <a:cs typeface="Consolas"/>
+              </a:rPr>
+              <a:t>            "Tops": 15</a:t>
+            </a:r>
+          </a:p>
+          <a:p>
+            <a:pPr algn="l"/>
+            <a:r>
+              <a:rPr lang="en-US" sz="1400" dirty="0">
+                <a:solidFill>
+                  <a:srgbClr val="1F2937"/>
+                </a:solidFill>
+                <a:latin typeface="Consolas"/>
+                <a:cs typeface="Consolas"/>
+              </a:rPr>
+              <a:t>"Services"</a:t>
+            </a:r>
+          </a:p>
+          <a:p>
+            <a:pPr algn="l"/>
+            <a:r>
+              <a:rPr lang="en-US" sz="1400" dirty="0">
+                <a:solidFill>
+                  <a:srgbClr val="1F2937"/>
+                </a:solidFill>
+                <a:latin typeface="Consolas"/>
+                <a:cs typeface="Consolas"/>
+              </a:rPr>
+              <a:t>    "Support": 35</a:t>
+            </a:r>
+          </a:p>
+          <a:p>
+            <a:pPr algn="l"/>
+            <a:r>
+              <a:rPr lang="en-US" sz="1400" dirty="0">
+                <a:solidFill>
+                  <a:srgbClr val="1F2937"/>
+                </a:solidFill>
+                <a:latin typeface="Consolas"/>
+                <a:cs typeface="Consolas"/>
+              </a:rPr>
+              <a:t>    "Consulting": 12</a:t>
+            </a:r>
+          </a:p>
+          <a:p>
+            <a:pPr algn="l"/>
+            <a:r>
+              <a:rPr lang="en-US" sz="1400" dirty="0">
+                <a:solidFill>
+                  <a:srgbClr val="1F2937"/>
+                </a:solidFill>
+                <a:latin typeface="Consolas"/>
+                <a:cs typeface="Consolas"/>
+              </a:rPr>
+              <a:t>    "Training": 8</a:t>
+            </a:r>
+          </a:p>
+          <a:p>
+            <a:endParaRPr lang="en-US" sz="1400" dirty="0"/>
+          </a:p>
+          <a:p>
+            <a:pPr algn="l"/>
+            <a:r>
+              <a:rPr lang="en-US" sz="1400" dirty="0">
+                <a:solidFill>
+                  <a:srgbClr val="1F2937"/>
+                </a:solidFill>
+                <a:latin typeface="Consolas"/>
+                <a:cs typeface="Consolas"/>
+              </a:rPr>
+              <a:t>classDef important fill:#f96,stroke:#333,color:#000;</a:t>
             </a:r>
           </a:p>
         </p:txBody>
